--- a/exports/valletta_culture_slide.pptx
+++ b/exports/valletta_culture_slide.pptx
@@ -7,7 +7,7 @@
   <p:sldIdLst>
     <p:sldId id="256" r:id="rId7"/>
   </p:sldIdLst>
-  <p:sldSz cx="7315200" cy="7315200" type="screen4x3"/>
+  <p:sldSz cx="7315200" cy="8953500" type="screen4x3"/>
   <p:notesSz cx="6858000" cy="9144000"/>
   <p:defaultTextStyle>
     <a:defPPr>
@@ -3105,7 +3105,7 @@
         <p:spPr>
           <a:xfrm>
             <a:off x="0" y="0"/>
-            <a:ext cx="7315200" cy="7315200"/>
+            <a:ext cx="7315200" cy="8953500"/>
           </a:xfrm>
           <a:prstGeom prst="rect">
             <a:avLst/>

--- a/exports/valletta_culture_slide.pptx
+++ b/exports/valletta_culture_slide.pptx
@@ -7,7 +7,7 @@
   <p:sldIdLst>
     <p:sldId id="256" r:id="rId7"/>
   </p:sldIdLst>
-  <p:sldSz cx="7315200" cy="8953500" type="screen4x3"/>
+  <p:sldSz cx="9144000" cy="25740360" type="screen4x3"/>
   <p:notesSz cx="6858000" cy="9144000"/>
   <p:defaultTextStyle>
     <a:defPPr>
@@ -3105,7 +3105,7 @@
         <p:spPr>
           <a:xfrm>
             <a:off x="0" y="0"/>
-            <a:ext cx="7315200" cy="8953500"/>
+            <a:ext cx="9144000" cy="25740360"/>
           </a:xfrm>
           <a:prstGeom prst="rect">
             <a:avLst/>

--- a/exports/valletta_culture_slide.pptx
+++ b/exports/valletta_culture_slide.pptx
@@ -7,7 +7,7 @@
   <p:sldIdLst>
     <p:sldId id="256" r:id="rId7"/>
   </p:sldIdLst>
-  <p:sldSz cx="9144000" cy="25740360" type="screen4x3"/>
+  <p:sldSz cx="12191695" cy="5791055" type="screen4x3"/>
   <p:notesSz cx="6858000" cy="9144000"/>
   <p:defaultTextStyle>
     <a:defPPr>
@@ -3105,7 +3105,7 @@
         <p:spPr>
           <a:xfrm>
             <a:off x="0" y="0"/>
-            <a:ext cx="9144000" cy="25740360"/>
+            <a:ext cx="12191695" cy="5791055"/>
           </a:xfrm>
           <a:prstGeom prst="rect">
             <a:avLst/>
